--- a/marketing/partnership/Petrocertif-Partner-Value-Presentation.pptx
+++ b/marketing/partnership/Petrocertif-Partner-Value-Presentation.pptx
@@ -1094,6 +1094,12 @@
           <a:p>
             <a:r>
               <a:t>"This is the whole package, and it is not a subscription to a vocabulary app. It is workplace conversation practice, an interview room, a report that names what was missing, and a record the learner can show an employer. Free for your learners during the pilot, and free for the academy permanently — there is no platform fee in this model."</a:t>
+            </a:r>
+          </a:p>
+          <a:p/>
+          <a:p>
+            <a:r>
+              <a:t>Point at 'Starts where the learner is' and say where it came from: "Your own students told us the app opened above their level. This was built from that, in a week. That is how this partnership will work."</a:t>
             </a:r>
           </a:p>
           <a:p/>
@@ -7503,8 +7509,8 @@
         </p:nvSpPr>
         <p:spPr>
           <a:xfrm>
-            <a:off x="1060704" y="2542032"/>
-            <a:ext cx="4572000" cy="640080"/>
+            <a:off x="1060704" y="2487168"/>
+            <a:ext cx="4572000" cy="694944"/>
           </a:xfrm>
           <a:prstGeom prst="rect">
             <a:avLst/>
@@ -7519,7 +7525,7 @@
           <a:p>
             <a:pPr algn="l">
               <a:lnSpc>
-                <a:spcPct val="130000"/>
+                <a:spcPct val="128000"/>
               </a:lnSpc>
               <a:spcAft>
                 <a:spcPts val="0"/>
@@ -7611,8 +7617,8 @@
         </p:nvSpPr>
         <p:spPr>
           <a:xfrm>
-            <a:off x="1060704" y="3566160"/>
-            <a:ext cx="4572000" cy="640080"/>
+            <a:off x="1060704" y="3511296"/>
+            <a:ext cx="4572000" cy="694944"/>
           </a:xfrm>
           <a:prstGeom prst="rect">
             <a:avLst/>
@@ -7627,7 +7633,7 @@
           <a:p>
             <a:pPr algn="l">
               <a:lnSpc>
-                <a:spcPct val="130000"/>
+                <a:spcPct val="128000"/>
               </a:lnSpc>
               <a:spcAft>
                 <a:spcPts val="0"/>
@@ -7719,8 +7725,8 @@
         </p:nvSpPr>
         <p:spPr>
           <a:xfrm>
-            <a:off x="1060704" y="4590288"/>
-            <a:ext cx="4572000" cy="640080"/>
+            <a:off x="1060704" y="4535424"/>
+            <a:ext cx="4572000" cy="694944"/>
           </a:xfrm>
           <a:prstGeom prst="rect">
             <a:avLst/>
@@ -7735,7 +7741,7 @@
           <a:p>
             <a:pPr algn="l">
               <a:lnSpc>
-                <a:spcPct val="130000"/>
+                <a:spcPct val="128000"/>
               </a:lnSpc>
               <a:spcAft>
                 <a:spcPts val="0"/>
@@ -7827,8 +7833,8 @@
         </p:nvSpPr>
         <p:spPr>
           <a:xfrm>
-            <a:off x="6547104" y="2542032"/>
-            <a:ext cx="4572000" cy="640080"/>
+            <a:off x="6547104" y="2487168"/>
+            <a:ext cx="4572000" cy="694944"/>
           </a:xfrm>
           <a:prstGeom prst="rect">
             <a:avLst/>
@@ -7843,7 +7849,7 @@
           <a:p>
             <a:pPr algn="l">
               <a:lnSpc>
-                <a:spcPct val="130000"/>
+                <a:spcPct val="128000"/>
               </a:lnSpc>
               <a:spcAft>
                 <a:spcPts val="0"/>
@@ -7865,7 +7871,7 @@
                 </a:solidFill>
                 <a:latin typeface="Arial"/>
               </a:rPr>
-              <a:t>A career centre</a:t>
+              <a:t>Starts where the learner is</a:t>
             </a:r>
             <a:r>
               <a:rPr sz="1350">
@@ -7874,7 +7880,7 @@
                 </a:solidFill>
                 <a:latin typeface="Arial"/>
               </a:rPr>
-              <a:t> — destination guidance, plus a CV and LinkedIn coach</a:t>
+              <a:t> — a one-minute check, then Foundations: three sentences a day, French under every line</a:t>
             </a:r>
           </a:p>
         </p:txBody>
@@ -7935,8 +7941,8 @@
         </p:nvSpPr>
         <p:spPr>
           <a:xfrm>
-            <a:off x="6547104" y="3566160"/>
-            <a:ext cx="4572000" cy="640080"/>
+            <a:off x="6547104" y="3511296"/>
+            <a:ext cx="4572000" cy="694944"/>
           </a:xfrm>
           <a:prstGeom prst="rect">
             <a:avLst/>
@@ -7951,7 +7957,7 @@
           <a:p>
             <a:pPr algn="l">
               <a:lnSpc>
-                <a:spcPct val="130000"/>
+                <a:spcPct val="128000"/>
               </a:lnSpc>
               <a:spcAft>
                 <a:spcPts val="0"/>
@@ -8043,8 +8049,8 @@
         </p:nvSpPr>
         <p:spPr>
           <a:xfrm>
-            <a:off x="6547104" y="4590288"/>
-            <a:ext cx="4572000" cy="640080"/>
+            <a:off x="6547104" y="4535424"/>
+            <a:ext cx="4572000" cy="694944"/>
           </a:xfrm>
           <a:prstGeom prst="rect">
             <a:avLst/>
@@ -8059,7 +8065,7 @@
           <a:p>
             <a:pPr algn="l">
               <a:lnSpc>
-                <a:spcPct val="130000"/>
+                <a:spcPct val="128000"/>
               </a:lnSpc>
               <a:spcAft>
                 <a:spcPts val="0"/>
@@ -8081,7 +8087,7 @@
                 </a:solidFill>
                 <a:latin typeface="Arial"/>
               </a:rPr>
-              <a:t>84 guided daily sessions</a:t>
+              <a:t>A career centre and 84 daily sessions</a:t>
             </a:r>
             <a:r>
               <a:rPr sz="1350">
@@ -8090,7 +8096,7 @@
                 </a:solidFill>
                 <a:latin typeface="Arial"/>
               </a:rPr>
-              <a:t> — 25 minutes a day, in 15 languages, offline after first load</a:t>
+              <a:t> — CV and LinkedIn coach; 15 languages; offline after first load</a:t>
             </a:r>
           </a:p>
         </p:txBody>
@@ -10418,7 +10424,7 @@
                 </a:solidFill>
                 <a:latin typeface="Arial"/>
               </a:rPr>
-              <a:t>Your technical teaching, your assessments and your certification are untouched. Recordings never leave the learner's phone, and nothing is published without your written approval.</a:t>
+              <a:t>Your technical teaching, your assessments and your certification are untouched. Recordings never leave the learner's phone, nothing is published without your written approval — and no learner is put in front of English they cannot yet follow.</a:t>
             </a:r>
           </a:p>
         </p:txBody>
